--- a/Modul Minna 1/Bab 23/48. Minna 1 Tata Bahasa Bab 23 - Slide.pptx
+++ b/Modul Minna 1/Bab 23/48. Minna 1 Tata Bahasa Bab 23 - Slide.pptx
@@ -2768,7 +2768,7 @@
                 <a:ea typeface="Arial" pitchFamily="34" charset="-122"/>
                 <a:cs typeface="Arial" pitchFamily="34" charset="-120"/>
               </a:rPr>
-              <a:t>パリへいくとき、かばんをかいました。</a:t>
+              <a:t>メダンへいくとき、かばんをかいました。</a:t>
             </a:r>
             <a:endParaRPr lang="en-US" sz="1700" dirty="0"/>
           </a:p>
@@ -2807,7 +2807,7 @@
                 <a:ea typeface="Arial" pitchFamily="34" charset="-122"/>
                 <a:cs typeface="Arial" pitchFamily="34" charset="-120"/>
               </a:rPr>
-              <a:t>Pari e iku toki, kaban o kaimashita</a:t>
+              <a:t>Medan e iku toki, kaban o kaimashita</a:t>
             </a:r>
             <a:pPr indent="0" marL="0">
               <a:buNone/>
@@ -2835,7 +2835,7 @@
                 <a:ea typeface="Arial" pitchFamily="34" charset="-122"/>
                 <a:cs typeface="Arial" pitchFamily="34" charset="-120"/>
               </a:rPr>
-              <a:t>Waktu mau ke Paris, saya beli tas.</a:t>
+              <a:t>Waktu mau ke Medan, saya beli tas.</a:t>
             </a:r>
             <a:endParaRPr lang="en-US" sz="950" dirty="0"/>
           </a:p>
